--- a/SLIDE MA26 _ Speakers.pptx
+++ b/SLIDE MA26 _ Speakers.pptx
@@ -17733,8 +17733,8 @@
         </p:blipFill>
         <p:spPr>
           <a:xfrm>
-            <a:off x="387928" y="608155"/>
-            <a:ext cx="6349705" cy="2653080"/>
+            <a:off x="378784" y="480138"/>
+            <a:ext cx="6707456" cy="2802558"/>
           </a:xfrm>
           <a:prstGeom prst="roundRect">
             <a:avLst>
